--- a/output/진로학업설계_지원자료_안내_1장.pptx
+++ b/output/진로학업설계_지원자료_안내_1장.pptx
@@ -854,13 +854,6 @@
 <file path=ppt/slides/slide1.xml><?xml version="1.0" encoding="utf-8"?>
 <p:sld xmlns:a="http://schemas.openxmlformats.org/drawingml/2006/main" xmlns:r="http://schemas.openxmlformats.org/officeDocument/2006/relationships" xmlns:p="http://schemas.openxmlformats.org/presentationml/2006/main">
   <p:cSld name="Slide 1">
-    <p:bg>
-      <p:bgPr>
-        <a:solidFill>
-          <a:srgbClr val="FFFFFF"/>
-        </a:solidFill>
-      </p:bgPr>
-    </p:bg>
     <p:spTree>
       <p:nvGrpSpPr>
         <p:cNvPr id="1" name=""/>
@@ -1022,7 +1015,7 @@
         </p:nvSpPr>
         <p:spPr>
           <a:xfrm>
-            <a:off x="822960" y="2377440"/>
+            <a:off x="822960" y="2423160"/>
             <a:ext cx="548640" cy="548640"/>
           </a:xfrm>
           <a:prstGeom prst="ellipse">
@@ -1042,7 +1035,7 @@
         </p:nvSpPr>
         <p:spPr>
           <a:xfrm>
-            <a:off x="822960" y="2377440"/>
+            <a:off x="822960" y="2423160"/>
             <a:ext cx="548640" cy="548640"/>
           </a:xfrm>
           <a:prstGeom prst="rect">
@@ -1081,7 +1074,7 @@
         </p:nvSpPr>
         <p:spPr>
           <a:xfrm>
-            <a:off x="1554480" y="2359152"/>
+            <a:off x="1554480" y="2404872"/>
             <a:ext cx="3017520" cy="365760"/>
           </a:xfrm>
           <a:prstGeom prst="rect">
@@ -1120,7 +1113,7 @@
         </p:nvSpPr>
         <p:spPr>
           <a:xfrm>
-            <a:off x="1554480" y="2706624"/>
+            <a:off x="1554480" y="2752344"/>
             <a:ext cx="3017520" cy="274320"/>
           </a:xfrm>
           <a:prstGeom prst="rect">
@@ -1159,7 +1152,7 @@
         </p:nvSpPr>
         <p:spPr>
           <a:xfrm>
-            <a:off x="822960" y="3429000"/>
+            <a:off x="822960" y="3474720"/>
             <a:ext cx="548640" cy="548640"/>
           </a:xfrm>
           <a:prstGeom prst="ellipse">
@@ -1179,7 +1172,7 @@
         </p:nvSpPr>
         <p:spPr>
           <a:xfrm>
-            <a:off x="822960" y="3429000"/>
+            <a:off x="822960" y="3474720"/>
             <a:ext cx="548640" cy="548640"/>
           </a:xfrm>
           <a:prstGeom prst="rect">
@@ -1218,7 +1211,7 @@
         </p:nvSpPr>
         <p:spPr>
           <a:xfrm>
-            <a:off x="1554480" y="3410712"/>
+            <a:off x="1554480" y="3456432"/>
             <a:ext cx="3017520" cy="365760"/>
           </a:xfrm>
           <a:prstGeom prst="rect">
@@ -1257,7 +1250,7 @@
         </p:nvSpPr>
         <p:spPr>
           <a:xfrm>
-            <a:off x="822960" y="4480560"/>
+            <a:off x="822960" y="4526280"/>
             <a:ext cx="548640" cy="548640"/>
           </a:xfrm>
           <a:prstGeom prst="ellipse">
@@ -1277,7 +1270,7 @@
         </p:nvSpPr>
         <p:spPr>
           <a:xfrm>
-            <a:off x="822960" y="4480560"/>
+            <a:off x="822960" y="4526280"/>
             <a:ext cx="548640" cy="548640"/>
           </a:xfrm>
           <a:prstGeom prst="rect">
@@ -1316,7 +1309,7 @@
         </p:nvSpPr>
         <p:spPr>
           <a:xfrm>
-            <a:off x="1554480" y="4462272"/>
+            <a:off x="1554480" y="4507992"/>
             <a:ext cx="3017520" cy="365760"/>
           </a:xfrm>
           <a:prstGeom prst="rect">
@@ -1355,7 +1348,7 @@
         </p:nvSpPr>
         <p:spPr>
           <a:xfrm>
-            <a:off x="1554480" y="4809744"/>
+            <a:off x="1554480" y="4855464"/>
             <a:ext cx="3017520" cy="274320"/>
           </a:xfrm>
           <a:prstGeom prst="rect">
@@ -1451,7 +1444,7 @@
         <p:spPr>
           <a:xfrm>
             <a:off x="5120640" y="1554480"/>
-            <a:ext cx="6583680" cy="365760"/>
+            <a:ext cx="6492240" cy="365760"/>
           </a:xfrm>
           <a:prstGeom prst="rect">
             <a:avLst/>
@@ -1475,7 +1468,7 @@
                 <a:ea typeface="Malgun Gothic" pitchFamily="34" charset="-122"/>
                 <a:cs typeface="Malgun Gothic" pitchFamily="34" charset="-120"/>
               </a:rPr>
-              <a:t>진로·진학 상담 안내서 3종 구성</a:t>
+              <a:t>진로·진학 상담 안내서 3종</a:t>
             </a:r>
             <a:endParaRPr lang="en-US" sz="1800" dirty="0"/>
           </a:p>
@@ -1490,11 +1483,11 @@
         <p:spPr>
           <a:xfrm>
             <a:off x="5120640" y="2057400"/>
-            <a:ext cx="6492240" cy="960120"/>
+            <a:ext cx="6492240" cy="731520"/>
           </a:xfrm>
           <a:prstGeom prst="roundRect">
             <a:avLst>
-              <a:gd name="adj" fmla="val 9524"/>
+              <a:gd name="adj" fmla="val 12500"/>
             </a:avLst>
           </a:prstGeom>
           <a:solidFill>
@@ -1511,12 +1504,12 @@
         </p:nvSpPr>
         <p:spPr>
           <a:xfrm>
-            <a:off x="5303520" y="2258568"/>
-            <a:ext cx="1188720" cy="548640"/>
+            <a:off x="5303520" y="2194560"/>
+            <a:ext cx="1188720" cy="457200"/>
           </a:xfrm>
           <a:prstGeom prst="roundRect">
             <a:avLst>
-              <a:gd name="adj" fmla="val 16667"/>
+              <a:gd name="adj" fmla="val 20000"/>
             </a:avLst>
           </a:prstGeom>
           <a:solidFill>
@@ -1533,8 +1526,8 @@
         </p:nvSpPr>
         <p:spPr>
           <a:xfrm>
-            <a:off x="5303520" y="2258568"/>
-            <a:ext cx="1188720" cy="548640"/>
+            <a:off x="5303520" y="2194560"/>
+            <a:ext cx="1188720" cy="457200"/>
           </a:xfrm>
           <a:prstGeom prst="rect">
             <a:avLst/>
@@ -1572,8 +1565,8 @@
         </p:nvSpPr>
         <p:spPr>
           <a:xfrm>
-            <a:off x="6675120" y="2148840"/>
-            <a:ext cx="4846320" cy="365760"/>
+            <a:off x="6720840" y="2057400"/>
+            <a:ext cx="4754880" cy="731520"/>
           </a:xfrm>
           <a:prstGeom prst="rect">
             <a:avLst/>
@@ -1597,7 +1590,7 @@
                 <a:ea typeface="Malgun Gothic" pitchFamily="34" charset="-122"/>
                 <a:cs typeface="Malgun Gothic" pitchFamily="34" charset="-120"/>
               </a:rPr>
-              <a:t>교육과정 연계 진로·학업설계</a:t>
+              <a:t>고교학점제 기반 교육과정 연계 진로·학업설계</a:t>
             </a:r>
             <a:endParaRPr lang="en-US" sz="1600" dirty="0"/>
           </a:p>
@@ -1605,42 +1598,25 @@
       </p:sp>
       <p:sp>
         <p:nvSpPr>
-          <p:cNvPr id="23" name="Text 21"/>
-          <p:cNvSpPr txBox="1"/>
-          <p:nvPr/>
-        </p:nvSpPr>
-        <p:spPr>
-          <a:xfrm>
-            <a:off x="6675120" y="2514600"/>
-            <a:ext cx="4846320" cy="411480"/>
-          </a:xfrm>
-          <a:prstGeom prst="rect">
-            <a:avLst/>
-          </a:prstGeom>
-          <a:noFill/>
-          <a:ln/>
-        </p:spPr>
-        <p:txBody>
-          <a:bodyPr wrap="square" lIns="0" tIns="0" rIns="0" bIns="0" rtlCol="0" anchor="ctr"/>
-          <a:lstStyle/>
-          <a:p>
-            <a:pPr indent="0" marL="0">
-              <a:buNone/>
-            </a:pPr>
-            <a:r>
-              <a:rPr lang="en-US" sz="1200" dirty="0">
-                <a:solidFill>
-                  <a:srgbClr val="555B6E"/>
-                </a:solidFill>
-                <a:latin typeface="Malgun Gothic" pitchFamily="34" charset="0"/>
-                <a:ea typeface="Malgun Gothic" pitchFamily="34" charset="-122"/>
-                <a:cs typeface="Malgun Gothic" pitchFamily="34" charset="-120"/>
-              </a:rPr>
-              <a:t>고교학점제·대입 전형의 이해, 진로전담교사의 역할, 과목 매칭 가이드</a:t>
-            </a:r>
-            <a:endParaRPr lang="en-US" sz="1200" dirty="0"/>
-          </a:p>
-        </p:txBody>
+          <p:cNvPr id="23" name="Shape 21"/>
+          <p:cNvSpPr/>
+          <p:nvPr/>
+        </p:nvSpPr>
+        <p:spPr>
+          <a:xfrm>
+            <a:off x="5120640" y="2926080"/>
+            <a:ext cx="6492240" cy="731520"/>
+          </a:xfrm>
+          <a:prstGeom prst="roundRect">
+            <a:avLst>
+              <a:gd name="adj" fmla="val 12500"/>
+            </a:avLst>
+          </a:prstGeom>
+          <a:solidFill>
+            <a:srgbClr val="EEF3FA"/>
+          </a:solidFill>
+          <a:ln/>
+        </p:spPr>
       </p:sp>
       <p:sp>
         <p:nvSpPr>
@@ -1650,37 +1626,15 @@
         </p:nvSpPr>
         <p:spPr>
           <a:xfrm>
-            <a:off x="5120640" y="3154680"/>
-            <a:ext cx="6492240" cy="960120"/>
+            <a:off x="5303520" y="3063240"/>
+            <a:ext cx="1188720" cy="457200"/>
           </a:xfrm>
           <a:prstGeom prst="roundRect">
             <a:avLst>
-              <a:gd name="adj" fmla="val 9524"/>
+              <a:gd name="adj" fmla="val 20000"/>
             </a:avLst>
           </a:prstGeom>
           <a:solidFill>
-            <a:srgbClr val="EEF3FA"/>
-          </a:solidFill>
-          <a:ln/>
-        </p:spPr>
-      </p:sp>
-      <p:sp>
-        <p:nvSpPr>
-          <p:cNvPr id="25" name="Shape 23"/>
-          <p:cNvSpPr/>
-          <p:nvPr/>
-        </p:nvSpPr>
-        <p:spPr>
-          <a:xfrm>
-            <a:off x="5303520" y="3355848"/>
-            <a:ext cx="1188720" cy="548640"/>
-          </a:xfrm>
-          <a:prstGeom prst="roundRect">
-            <a:avLst>
-              <a:gd name="adj" fmla="val 16667"/>
-            </a:avLst>
-          </a:prstGeom>
-          <a:solidFill>
             <a:srgbClr val="0E7C86"/>
           </a:solidFill>
           <a:ln/>
@@ -1688,14 +1642,14 @@
       </p:sp>
       <p:sp>
         <p:nvSpPr>
-          <p:cNvPr id="26" name="Text 24"/>
+          <p:cNvPr id="25" name="Text 23"/>
           <p:cNvSpPr txBox="1"/>
           <p:nvPr/>
         </p:nvSpPr>
         <p:spPr>
           <a:xfrm>
-            <a:off x="5303520" y="3355848"/>
-            <a:ext cx="1188720" cy="548640"/>
+            <a:off x="5303520" y="3063240"/>
+            <a:ext cx="1188720" cy="457200"/>
           </a:xfrm>
           <a:prstGeom prst="rect">
             <a:avLst/>
@@ -1727,14 +1681,14 @@
       </p:sp>
       <p:sp>
         <p:nvSpPr>
-          <p:cNvPr id="27" name="Text 25"/>
+          <p:cNvPr id="26" name="Text 24"/>
           <p:cNvSpPr txBox="1"/>
           <p:nvPr/>
         </p:nvSpPr>
         <p:spPr>
           <a:xfrm>
-            <a:off x="6675120" y="3246120"/>
-            <a:ext cx="4846320" cy="365760"/>
+            <a:off x="6720840" y="2926080"/>
+            <a:ext cx="4754880" cy="731520"/>
           </a:xfrm>
           <a:prstGeom prst="rect">
             <a:avLst/>
@@ -1766,57 +1720,18 @@
       </p:sp>
       <p:sp>
         <p:nvSpPr>
-          <p:cNvPr id="28" name="Text 26"/>
-          <p:cNvSpPr txBox="1"/>
-          <p:nvPr/>
-        </p:nvSpPr>
-        <p:spPr>
-          <a:xfrm>
-            <a:off x="6675120" y="3611880"/>
-            <a:ext cx="4846320" cy="411480"/>
-          </a:xfrm>
-          <a:prstGeom prst="rect">
-            <a:avLst/>
-          </a:prstGeom>
-          <a:noFill/>
-          <a:ln/>
-        </p:spPr>
-        <p:txBody>
-          <a:bodyPr wrap="square" lIns="0" tIns="0" rIns="0" bIns="0" rtlCol="0" anchor="ctr"/>
-          <a:lstStyle/>
-          <a:p>
-            <a:pPr indent="0" marL="0">
-              <a:buNone/>
-            </a:pPr>
-            <a:r>
-              <a:rPr lang="en-US" sz="1200" dirty="0">
-                <a:solidFill>
-                  <a:srgbClr val="555B6E"/>
-                </a:solidFill>
-                <a:latin typeface="Malgun Gothic" pitchFamily="34" charset="0"/>
-                <a:ea typeface="Malgun Gothic" pitchFamily="34" charset="-122"/>
-                <a:cs typeface="Malgun Gothic" pitchFamily="34" charset="-120"/>
-              </a:rPr>
-              <a:t>GROW 코칭·SMART 목표, 5대 진로 변경 유형, 상담 7단계, 7가지 사례</a:t>
-            </a:r>
-            <a:endParaRPr lang="en-US" sz="1200" dirty="0"/>
-          </a:p>
-        </p:txBody>
-      </p:sp>
-      <p:sp>
-        <p:nvSpPr>
-          <p:cNvPr id="29" name="Shape 27"/>
+          <p:cNvPr id="27" name="Shape 25"/>
           <p:cNvSpPr/>
           <p:nvPr/>
         </p:nvSpPr>
         <p:spPr>
           <a:xfrm>
-            <a:off x="5120640" y="4251960"/>
-            <a:ext cx="6492240" cy="960120"/>
+            <a:off x="5120640" y="3794760"/>
+            <a:ext cx="6492240" cy="731520"/>
           </a:xfrm>
           <a:prstGeom prst="roundRect">
             <a:avLst>
-              <a:gd name="adj" fmla="val 9524"/>
+              <a:gd name="adj" fmla="val 12500"/>
             </a:avLst>
           </a:prstGeom>
           <a:solidFill>
@@ -1827,18 +1742,18 @@
       </p:sp>
       <p:sp>
         <p:nvSpPr>
-          <p:cNvPr id="30" name="Shape 28"/>
+          <p:cNvPr id="28" name="Shape 26"/>
           <p:cNvSpPr/>
           <p:nvPr/>
         </p:nvSpPr>
         <p:spPr>
           <a:xfrm>
-            <a:off x="5303520" y="4453128"/>
-            <a:ext cx="1188720" cy="548640"/>
+            <a:off x="5303520" y="3931920"/>
+            <a:ext cx="1188720" cy="457200"/>
           </a:xfrm>
           <a:prstGeom prst="roundRect">
             <a:avLst>
-              <a:gd name="adj" fmla="val 16667"/>
+              <a:gd name="adj" fmla="val 20000"/>
             </a:avLst>
           </a:prstGeom>
           <a:solidFill>
@@ -1849,14 +1764,14 @@
       </p:sp>
       <p:sp>
         <p:nvSpPr>
-          <p:cNvPr id="31" name="Text 29"/>
+          <p:cNvPr id="29" name="Text 27"/>
           <p:cNvSpPr txBox="1"/>
           <p:nvPr/>
         </p:nvSpPr>
         <p:spPr>
           <a:xfrm>
-            <a:off x="5303520" y="4453128"/>
-            <a:ext cx="1188720" cy="548640"/>
+            <a:off x="5303520" y="3931920"/>
+            <a:ext cx="1188720" cy="457200"/>
           </a:xfrm>
           <a:prstGeom prst="rect">
             <a:avLst/>
@@ -1888,14 +1803,14 @@
       </p:sp>
       <p:sp>
         <p:nvSpPr>
-          <p:cNvPr id="32" name="Text 30"/>
+          <p:cNvPr id="30" name="Text 28"/>
           <p:cNvSpPr txBox="1"/>
           <p:nvPr/>
         </p:nvSpPr>
         <p:spPr>
           <a:xfrm>
-            <a:off x="6675120" y="4343400"/>
-            <a:ext cx="4846320" cy="365760"/>
+            <a:off x="6720840" y="3794760"/>
+            <a:ext cx="4754880" cy="731520"/>
           </a:xfrm>
           <a:prstGeom prst="rect">
             <a:avLst/>
@@ -1927,63 +1842,24 @@
       </p:sp>
       <p:sp>
         <p:nvSpPr>
-          <p:cNvPr id="33" name="Text 31"/>
-          <p:cNvSpPr txBox="1"/>
-          <p:nvPr/>
-        </p:nvSpPr>
-        <p:spPr>
-          <a:xfrm>
-            <a:off x="6675120" y="4709160"/>
-            <a:ext cx="4846320" cy="411480"/>
-          </a:xfrm>
-          <a:prstGeom prst="rect">
-            <a:avLst/>
-          </a:prstGeom>
-          <a:noFill/>
-          <a:ln/>
-        </p:spPr>
-        <p:txBody>
-          <a:bodyPr wrap="square" lIns="0" tIns="0" rIns="0" bIns="0" rtlCol="0" anchor="ctr"/>
-          <a:lstStyle/>
-          <a:p>
-            <a:pPr indent="0" marL="0">
-              <a:buNone/>
-            </a:pPr>
-            <a:r>
-              <a:rPr lang="en-US" sz="1200" dirty="0">
-                <a:solidFill>
-                  <a:srgbClr val="555B6E"/>
-                </a:solidFill>
-                <a:latin typeface="Malgun Gothic" pitchFamily="34" charset="0"/>
-                <a:ea typeface="Malgun Gothic" pitchFamily="34" charset="-122"/>
-                <a:cs typeface="Malgun Gothic" pitchFamily="34" charset="-120"/>
-              </a:rPr>
-              <a:t>교과 체계·성적 산출, 과목 설계 5단계, 생기부 관리, 직업계고 학점제</a:t>
-            </a:r>
-            <a:endParaRPr lang="en-US" sz="1200" dirty="0"/>
-          </a:p>
-        </p:txBody>
-      </p:sp>
-      <p:sp>
-        <p:nvSpPr>
-          <p:cNvPr id="34" name="Shape 32"/>
+          <p:cNvPr id="31" name="Shape 29"/>
           <p:cNvSpPr/>
           <p:nvPr/>
         </p:nvSpPr>
         <p:spPr>
           <a:xfrm>
-            <a:off x="5120640" y="5394960"/>
-            <a:ext cx="6492240" cy="731520"/>
+            <a:off x="5120640" y="4800600"/>
+            <a:ext cx="6492240" cy="1325880"/>
           </a:xfrm>
           <a:prstGeom prst="roundRect">
             <a:avLst>
-              <a:gd name="adj" fmla="val 12500"/>
+              <a:gd name="adj" fmla="val 6897"/>
             </a:avLst>
           </a:prstGeom>
           <a:solidFill>
             <a:srgbClr val="FFFFFF"/>
           </a:solidFill>
-          <a:ln w="19050">
+          <a:ln w="25400">
             <a:solidFill>
               <a:srgbClr val="0E7C86"/>
             </a:solidFill>
@@ -1993,14 +1869,14 @@
       </p:sp>
       <p:sp>
         <p:nvSpPr>
-          <p:cNvPr id="35" name="Text 33"/>
+          <p:cNvPr id="32" name="Text 30"/>
           <p:cNvSpPr txBox="1"/>
           <p:nvPr/>
         </p:nvSpPr>
         <p:spPr>
           <a:xfrm>
-            <a:off x="5303520" y="5394960"/>
-            <a:ext cx="6126480" cy="731520"/>
+            <a:off x="5394960" y="4983480"/>
+            <a:ext cx="5943600" cy="411480"/>
           </a:xfrm>
           <a:prstGeom prst="rect">
             <a:avLst/>
@@ -2016,7 +1892,7 @@
               <a:buNone/>
             </a:pPr>
             <a:r>
-              <a:rPr lang="en-US" sz="1400" b="1" dirty="0">
+              <a:rPr lang="en-US" sz="2000" b="1" dirty="0">
                 <a:solidFill>
                   <a:srgbClr val="0E7C86"/>
                 </a:solidFill>
@@ -2024,8 +1900,33 @@
                 <a:ea typeface="Malgun Gothic" pitchFamily="34" charset="-122"/>
                 <a:cs typeface="Malgun Gothic" pitchFamily="34" charset="-120"/>
               </a:rPr>
-              <a:t>함께 탑재된 자료  </a:t>
-            </a:r>
+              <a:t>자세한 구성은 출력물(별첨) 참고</a:t>
+            </a:r>
+            <a:endParaRPr lang="en-US" sz="2000" dirty="0"/>
+          </a:p>
+        </p:txBody>
+      </p:sp>
+      <p:sp>
+        <p:nvSpPr>
+          <p:cNvPr id="33" name="Text 31"/>
+          <p:cNvSpPr txBox="1"/>
+          <p:nvPr/>
+        </p:nvSpPr>
+        <p:spPr>
+          <a:xfrm>
+            <a:off x="5394960" y="5486400"/>
+            <a:ext cx="5943600" cy="502920"/>
+          </a:xfrm>
+          <a:prstGeom prst="rect">
+            <a:avLst/>
+          </a:prstGeom>
+          <a:noFill/>
+          <a:ln/>
+        </p:spPr>
+        <p:txBody>
+          <a:bodyPr wrap="square" lIns="0" tIns="0" rIns="0" bIns="0" rtlCol="0" anchor="ctr"/>
+          <a:lstStyle/>
+          <a:p>
             <a:pPr indent="0" marL="0">
               <a:buNone/>
             </a:pPr>
@@ -2038,7 +1939,24 @@
                 <a:ea typeface="Malgun Gothic" pitchFamily="34" charset="-122"/>
                 <a:cs typeface="Malgun Gothic" pitchFamily="34" charset="-120"/>
               </a:rPr>
-              <a:t>연수 프로그램북 4종(주제 4: AI 활용 포함) · 우수 지도 사례집 1종</a:t>
+              <a:t>안내서 구성과 활용 · 상황별 빠른 가이드는 별도 배부 자료에 있습니다.</a:t>
+            </a:r>
+            <a:endParaRPr lang="en-US" sz="1400" dirty="0"/>
+          </a:p>
+          <a:p>
+            <a:pPr indent="0" marL="0">
+              <a:buNone/>
+            </a:pPr>
+            <a:r>
+              <a:rPr lang="en-US" sz="1400" dirty="0">
+                <a:solidFill>
+                  <a:srgbClr val="1F2A5C"/>
+                </a:solidFill>
+                <a:latin typeface="Malgun Gothic" pitchFamily="34" charset="0"/>
+                <a:ea typeface="Malgun Gothic" pitchFamily="34" charset="-122"/>
+                <a:cs typeface="Malgun Gothic" pitchFamily="34" charset="-120"/>
+              </a:rPr>
+              <a:t>함께 탑재: 연수 프로그램북 4종 · 우수 지도 사례집 1종</a:t>
             </a:r>
             <a:endParaRPr lang="en-US" sz="1400" dirty="0"/>
           </a:p>
